--- a/chapter8/parts/part-08-best-practices/clip.pptx
+++ b/chapter8/parts/part-08-best-practices/clip.pptx
@@ -4327,10 +4327,12 @@
           </a:bodyPr>
           <a:lstStyle/>
           <a:p>
-            <a:pPr>
+            <a:pPr lvl="0" marL="457200" indent="-228600">
+              <a:buFont typeface="Calibri"/>
               <a:spcAft>
                 <a:spcPts val="1000"/>
               </a:spcAft>
+              <a:buSzPct val="100000"/>
               <a:buChar char="•"/>
               <a:lnSpc>
                 <a:spcPts val="2200"/>
@@ -4347,10 +4349,12 @@
             </a:r>
           </a:p>
           <a:p>
-            <a:pPr>
+            <a:pPr lvl="0" marL="457200" indent="-228600">
+              <a:buFont typeface="Calibri"/>
               <a:spcAft>
                 <a:spcPts val="1000"/>
               </a:spcAft>
+              <a:buSzPct val="100000"/>
               <a:buChar char="•"/>
               <a:lnSpc>
                 <a:spcPts val="2200"/>
@@ -4486,10 +4490,12 @@
           </a:bodyPr>
           <a:lstStyle/>
           <a:p>
-            <a:pPr>
+            <a:pPr lvl="0" marL="457200" indent="-228600">
+              <a:buFont typeface="Calibri"/>
               <a:spcAft>
                 <a:spcPts val="1000"/>
               </a:spcAft>
+              <a:buSzPct val="100000"/>
               <a:buChar char="•"/>
               <a:lnSpc>
                 <a:spcPts val="2200"/>
@@ -4506,10 +4512,12 @@
             </a:r>
           </a:p>
           <a:p>
-            <a:pPr>
+            <a:pPr lvl="0" marL="457200" indent="-228600">
+              <a:buFont typeface="Calibri"/>
               <a:spcAft>
                 <a:spcPts val="1000"/>
               </a:spcAft>
+              <a:buSzPct val="100000"/>
               <a:buChar char="•"/>
               <a:lnSpc>
                 <a:spcPts val="2200"/>
@@ -4645,10 +4653,12 @@
           </a:bodyPr>
           <a:lstStyle/>
           <a:p>
-            <a:pPr>
+            <a:pPr lvl="0" marL="457200" indent="-228600">
+              <a:buFont typeface="Calibri"/>
               <a:spcAft>
                 <a:spcPts val="1000"/>
               </a:spcAft>
+              <a:buSzPct val="100000"/>
               <a:buChar char="•"/>
               <a:lnSpc>
                 <a:spcPts val="2200"/>
@@ -4784,10 +4794,12 @@
           </a:bodyPr>
           <a:lstStyle/>
           <a:p>
-            <a:pPr>
+            <a:pPr lvl="0" marL="457200" indent="-228600">
+              <a:buFont typeface="Calibri"/>
               <a:spcAft>
                 <a:spcPts val="1000"/>
               </a:spcAft>
+              <a:buSzPct val="100000"/>
               <a:buChar char="•"/>
               <a:lnSpc>
                 <a:spcPts val="2200"/>
@@ -4804,10 +4816,12 @@
             </a:r>
           </a:p>
           <a:p>
-            <a:pPr>
+            <a:pPr lvl="0" marL="457200" indent="-228600">
+              <a:buFont typeface="Calibri"/>
               <a:spcAft>
                 <a:spcPts val="1000"/>
               </a:spcAft>
+              <a:buSzPct val="100000"/>
               <a:buChar char="•"/>
               <a:lnSpc>
                 <a:spcPts val="2200"/>
@@ -4824,10 +4838,12 @@
             </a:r>
           </a:p>
           <a:p>
-            <a:pPr>
+            <a:pPr lvl="0" marL="457200" indent="-228600">
+              <a:buFont typeface="Calibri"/>
               <a:spcAft>
                 <a:spcPts val="1000"/>
               </a:spcAft>
+              <a:buSzPct val="100000"/>
               <a:buChar char="•"/>
               <a:lnSpc>
                 <a:spcPts val="2200"/>
@@ -4963,10 +4979,12 @@
           </a:bodyPr>
           <a:lstStyle/>
           <a:p>
-            <a:pPr>
+            <a:pPr lvl="0" marL="457200" indent="-228600">
+              <a:buFont typeface="Calibri"/>
               <a:spcAft>
                 <a:spcPts val="1000"/>
               </a:spcAft>
+              <a:buSzPct val="100000"/>
               <a:buChar char="•"/>
               <a:lnSpc>
                 <a:spcPts val="2200"/>
@@ -4983,10 +5001,12 @@
             </a:r>
           </a:p>
           <a:p>
-            <a:pPr>
+            <a:pPr lvl="0" marL="457200" indent="-228600">
+              <a:buFont typeface="Calibri"/>
               <a:spcAft>
                 <a:spcPts val="1000"/>
               </a:spcAft>
+              <a:buSzPct val="100000"/>
               <a:buChar char="•"/>
               <a:lnSpc>
                 <a:spcPts val="2200"/>
@@ -5003,10 +5023,12 @@
             </a:r>
           </a:p>
           <a:p>
-            <a:pPr>
+            <a:pPr lvl="0" marL="457200" indent="-228600">
+              <a:buFont typeface="Calibri"/>
               <a:spcAft>
                 <a:spcPts val="1000"/>
               </a:spcAft>
+              <a:buSzPct val="100000"/>
               <a:buChar char="•"/>
               <a:lnSpc>
                 <a:spcPts val="2200"/>
@@ -5023,10 +5045,12 @@
             </a:r>
           </a:p>
           <a:p>
-            <a:pPr>
+            <a:pPr lvl="0" marL="457200" indent="-228600">
+              <a:buFont typeface="Calibri"/>
               <a:spcAft>
                 <a:spcPts val="1000"/>
               </a:spcAft>
+              <a:buSzPct val="100000"/>
               <a:buChar char="•"/>
               <a:lnSpc>
                 <a:spcPts val="2200"/>
@@ -5530,10 +5554,12 @@
           </a:bodyPr>
           <a:lstStyle/>
           <a:p>
-            <a:pPr>
+            <a:pPr lvl="0" marL="457200" indent="-228600">
+              <a:buFont typeface="Calibri"/>
               <a:spcAft>
                 <a:spcPts val="1000"/>
               </a:spcAft>
+              <a:buSzPct val="100000"/>
               <a:buChar char="•"/>
               <a:lnSpc>
                 <a:spcPts val="2200"/>
@@ -5550,10 +5576,12 @@
             </a:r>
           </a:p>
           <a:p>
-            <a:pPr>
+            <a:pPr lvl="0" marL="457200" indent="-228600">
+              <a:buFont typeface="Calibri"/>
               <a:spcAft>
                 <a:spcPts val="1000"/>
               </a:spcAft>
+              <a:buSzPct val="100000"/>
               <a:buChar char="•"/>
               <a:lnSpc>
                 <a:spcPts val="2200"/>
@@ -5570,10 +5598,12 @@
             </a:r>
           </a:p>
           <a:p>
-            <a:pPr>
+            <a:pPr lvl="0" marL="457200" indent="-228600">
+              <a:buFont typeface="Calibri"/>
               <a:spcAft>
                 <a:spcPts val="1000"/>
               </a:spcAft>
+              <a:buSzPct val="100000"/>
               <a:buChar char="•"/>
               <a:lnSpc>
                 <a:spcPts val="2200"/>
@@ -5709,10 +5739,12 @@
           </a:bodyPr>
           <a:lstStyle/>
           <a:p>
-            <a:pPr>
+            <a:pPr lvl="0" marL="457200" indent="-228600">
+              <a:buFont typeface="Calibri"/>
               <a:spcAft>
                 <a:spcPts val="1000"/>
               </a:spcAft>
+              <a:buSzPct val="100000"/>
               <a:buChar char="•"/>
               <a:lnSpc>
                 <a:spcPts val="2200"/>
@@ -5729,10 +5761,12 @@
             </a:r>
           </a:p>
           <a:p>
-            <a:pPr>
+            <a:pPr lvl="0" marL="457200" indent="-228600">
+              <a:buFont typeface="Calibri"/>
               <a:spcAft>
                 <a:spcPts val="1000"/>
               </a:spcAft>
+              <a:buSzPct val="100000"/>
               <a:buChar char="•"/>
               <a:lnSpc>
                 <a:spcPts val="2200"/>
@@ -5749,10 +5783,12 @@
             </a:r>
           </a:p>
           <a:p>
-            <a:pPr>
+            <a:pPr lvl="0" marL="457200" indent="-228600">
+              <a:buFont typeface="Calibri"/>
               <a:spcAft>
                 <a:spcPts val="1000"/>
               </a:spcAft>
+              <a:buSzPct val="100000"/>
               <a:buChar char="•"/>
               <a:lnSpc>
                 <a:spcPts val="2200"/>
@@ -5769,10 +5805,12 @@
             </a:r>
           </a:p>
           <a:p>
-            <a:pPr>
+            <a:pPr lvl="0" marL="457200" indent="-228600">
+              <a:buFont typeface="Calibri"/>
               <a:spcAft>
                 <a:spcPts val="1000"/>
               </a:spcAft>
+              <a:buSzPct val="100000"/>
               <a:buChar char="•"/>
               <a:lnSpc>
                 <a:spcPts val="2200"/>
@@ -5908,10 +5946,12 @@
           </a:bodyPr>
           <a:lstStyle/>
           <a:p>
-            <a:pPr>
+            <a:pPr lvl="0" marL="457200" indent="-228600">
+              <a:buFont typeface="Calibri"/>
               <a:spcAft>
                 <a:spcPts val="1000"/>
               </a:spcAft>
+              <a:buSzPct val="100000"/>
               <a:buChar char="•"/>
               <a:lnSpc>
                 <a:spcPts val="2200"/>
@@ -5928,10 +5968,12 @@
             </a:r>
           </a:p>
           <a:p>
-            <a:pPr>
+            <a:pPr lvl="0" marL="457200" indent="-228600">
+              <a:buFont typeface="Calibri"/>
               <a:spcAft>
                 <a:spcPts val="1000"/>
               </a:spcAft>
+              <a:buSzPct val="100000"/>
               <a:buChar char="•"/>
               <a:lnSpc>
                 <a:spcPts val="2200"/>
@@ -5948,10 +5990,12 @@
             </a:r>
           </a:p>
           <a:p>
-            <a:pPr>
+            <a:pPr lvl="0" marL="457200" indent="-228600">
+              <a:buFont typeface="Calibri"/>
               <a:spcAft>
                 <a:spcPts val="1000"/>
               </a:spcAft>
+              <a:buSzPct val="100000"/>
               <a:buChar char="•"/>
               <a:lnSpc>
                 <a:spcPts val="2200"/>
@@ -6087,10 +6131,12 @@
           </a:bodyPr>
           <a:lstStyle/>
           <a:p>
-            <a:pPr>
+            <a:pPr lvl="0" marL="457200" indent="-228600">
+              <a:buFont typeface="Calibri"/>
               <a:spcAft>
                 <a:spcPts val="1000"/>
               </a:spcAft>
+              <a:buSzPct val="100000"/>
               <a:buChar char="•"/>
               <a:lnSpc>
                 <a:spcPts val="2200"/>
@@ -6107,10 +6153,12 @@
             </a:r>
           </a:p>
           <a:p>
-            <a:pPr>
+            <a:pPr lvl="0" marL="457200" indent="-228600">
+              <a:buFont typeface="Calibri"/>
               <a:spcAft>
                 <a:spcPts val="1000"/>
               </a:spcAft>
+              <a:buSzPct val="100000"/>
               <a:buChar char="•"/>
               <a:lnSpc>
                 <a:spcPts val="2200"/>
@@ -6127,10 +6175,12 @@
             </a:r>
           </a:p>
           <a:p>
-            <a:pPr>
+            <a:pPr lvl="0" marL="457200" indent="-228600">
+              <a:buFont typeface="Calibri"/>
               <a:spcAft>
                 <a:spcPts val="1000"/>
               </a:spcAft>
+              <a:buSzPct val="100000"/>
               <a:buChar char="•"/>
               <a:lnSpc>
                 <a:spcPts val="2200"/>
@@ -6147,10 +6197,12 @@
             </a:r>
           </a:p>
           <a:p>
-            <a:pPr>
+            <a:pPr lvl="0" marL="457200" indent="-228600">
+              <a:buFont typeface="Calibri"/>
               <a:spcAft>
                 <a:spcPts val="1000"/>
               </a:spcAft>
+              <a:buSzPct val="100000"/>
               <a:buChar char="•"/>
               <a:lnSpc>
                 <a:spcPts val="2200"/>
@@ -6167,10 +6219,12 @@
             </a:r>
           </a:p>
           <a:p>
-            <a:pPr>
+            <a:pPr lvl="0" marL="457200" indent="-228600">
+              <a:buFont typeface="Calibri"/>
               <a:spcAft>
                 <a:spcPts val="1000"/>
               </a:spcAft>
+              <a:buSzPct val="100000"/>
               <a:buChar char="•"/>
               <a:lnSpc>
                 <a:spcPts val="2200"/>
